--- a/NovaDAO_Pitch_Deck.pptx
+++ b/NovaDAO_Pitch_Deck.pptx
@@ -8082,7 +8082,7 @@
                 <a:ea typeface="Calibri" pitchFamily="34" charset="-122"/>
                 <a:cs typeface="Calibri" pitchFamily="34" charset="-120"/>
               </a:rPr>
-              <a:t>novadao.xyz</a:t>
+              <a:t>novadao.net</a:t>
             </a:r>
             <a:endParaRPr lang="en-US" sz="1200" dirty="0"/>
           </a:p>
@@ -8160,7 +8160,7 @@
                 <a:ea typeface="Calibri" pitchFamily="34" charset="-122"/>
                 <a:cs typeface="Calibri" pitchFamily="34" charset="-120"/>
               </a:rPr>
-              <a:t>@NovaDAO_xyz</a:t>
+              <a:t>@NovaDAO_net</a:t>
             </a:r>
             <a:endParaRPr lang="en-US" sz="1200" dirty="0"/>
           </a:p>
@@ -8316,7 +8316,7 @@
                 <a:ea typeface="Calibri" pitchFamily="34" charset="-122"/>
                 <a:cs typeface="Calibri" pitchFamily="34" charset="-120"/>
               </a:rPr>
-              <a:t>hello@novadao.xyz</a:t>
+              <a:t>hello@novadao.net</a:t>
             </a:r>
             <a:endParaRPr lang="en-US" sz="1200" dirty="0"/>
           </a:p>
